--- a/Project/1-LIGHTING.pptx
+++ b/Project/1-LIGHTING.pptx
@@ -9,6 +9,7 @@
     <p:sldId id="258" r:id="rId3"/>
     <p:sldId id="259" r:id="rId4"/>
     <p:sldId id="257" r:id="rId5"/>
+    <p:sldId id="260" r:id="rId6"/>
   </p:sldIdLst>
   <p:sldSz cx="12192000" cy="6858000"/>
   <p:notesSz cx="6858000" cy="9144000"/>
@@ -107,6 +108,11 @@
       </a:defRPr>
     </a:lvl9pPr>
   </p:defaultTextStyle>
+  <p:extLst>
+    <p:ext uri="{EFAFB233-063F-42B5-8137-9DF3F51BA10A}">
+      <p15:sldGuideLst xmlns:p15="http://schemas.microsoft.com/office/powerpoint/2012/main"/>
+    </p:ext>
+  </p:extLst>
 </p:presentation>
 </file>
 
@@ -259,7 +265,7 @@
           <a:p>
             <a:fld id="{54232FB6-0DF2-4C19-B3B4-A0C039A1BAF7}" type="datetimeFigureOut">
               <a:rPr lang="en-GB" smtClean="0"/>
-              <a:t>18/07/2026</a:t>
+              <a:t>27/07/2026</a:t>
             </a:fld>
             <a:endParaRPr lang="en-GB"/>
           </a:p>
@@ -459,7 +465,7 @@
           <a:p>
             <a:fld id="{54232FB6-0DF2-4C19-B3B4-A0C039A1BAF7}" type="datetimeFigureOut">
               <a:rPr lang="en-GB" smtClean="0"/>
-              <a:t>18/07/2026</a:t>
+              <a:t>27/07/2026</a:t>
             </a:fld>
             <a:endParaRPr lang="en-GB"/>
           </a:p>
@@ -669,7 +675,7 @@
           <a:p>
             <a:fld id="{54232FB6-0DF2-4C19-B3B4-A0C039A1BAF7}" type="datetimeFigureOut">
               <a:rPr lang="en-GB" smtClean="0"/>
-              <a:t>18/07/2026</a:t>
+              <a:t>27/07/2026</a:t>
             </a:fld>
             <a:endParaRPr lang="en-GB"/>
           </a:p>
@@ -869,7 +875,7 @@
           <a:p>
             <a:fld id="{54232FB6-0DF2-4C19-B3B4-A0C039A1BAF7}" type="datetimeFigureOut">
               <a:rPr lang="en-GB" smtClean="0"/>
-              <a:t>18/07/2026</a:t>
+              <a:t>27/07/2026</a:t>
             </a:fld>
             <a:endParaRPr lang="en-GB"/>
           </a:p>
@@ -1145,7 +1151,7 @@
           <a:p>
             <a:fld id="{54232FB6-0DF2-4C19-B3B4-A0C039A1BAF7}" type="datetimeFigureOut">
               <a:rPr lang="en-GB" smtClean="0"/>
-              <a:t>18/07/2026</a:t>
+              <a:t>27/07/2026</a:t>
             </a:fld>
             <a:endParaRPr lang="en-GB"/>
           </a:p>
@@ -1413,7 +1419,7 @@
           <a:p>
             <a:fld id="{54232FB6-0DF2-4C19-B3B4-A0C039A1BAF7}" type="datetimeFigureOut">
               <a:rPr lang="en-GB" smtClean="0"/>
-              <a:t>18/07/2026</a:t>
+              <a:t>27/07/2026</a:t>
             </a:fld>
             <a:endParaRPr lang="en-GB"/>
           </a:p>
@@ -1828,7 +1834,7 @@
           <a:p>
             <a:fld id="{54232FB6-0DF2-4C19-B3B4-A0C039A1BAF7}" type="datetimeFigureOut">
               <a:rPr lang="en-GB" smtClean="0"/>
-              <a:t>18/07/2026</a:t>
+              <a:t>27/07/2026</a:t>
             </a:fld>
             <a:endParaRPr lang="en-GB"/>
           </a:p>
@@ -1970,7 +1976,7 @@
           <a:p>
             <a:fld id="{54232FB6-0DF2-4C19-B3B4-A0C039A1BAF7}" type="datetimeFigureOut">
               <a:rPr lang="en-GB" smtClean="0"/>
-              <a:t>18/07/2026</a:t>
+              <a:t>27/07/2026</a:t>
             </a:fld>
             <a:endParaRPr lang="en-GB"/>
           </a:p>
@@ -2083,7 +2089,7 @@
           <a:p>
             <a:fld id="{54232FB6-0DF2-4C19-B3B4-A0C039A1BAF7}" type="datetimeFigureOut">
               <a:rPr lang="en-GB" smtClean="0"/>
-              <a:t>18/07/2026</a:t>
+              <a:t>27/07/2026</a:t>
             </a:fld>
             <a:endParaRPr lang="en-GB"/>
           </a:p>
@@ -2396,7 +2402,7 @@
           <a:p>
             <a:fld id="{54232FB6-0DF2-4C19-B3B4-A0C039A1BAF7}" type="datetimeFigureOut">
               <a:rPr lang="en-GB" smtClean="0"/>
-              <a:t>18/07/2026</a:t>
+              <a:t>27/07/2026</a:t>
             </a:fld>
             <a:endParaRPr lang="en-GB"/>
           </a:p>
@@ -2685,7 +2691,7 @@
           <a:p>
             <a:fld id="{54232FB6-0DF2-4C19-B3B4-A0C039A1BAF7}" type="datetimeFigureOut">
               <a:rPr lang="en-GB" smtClean="0"/>
-              <a:t>18/07/2026</a:t>
+              <a:t>27/07/2026</a:t>
             </a:fld>
             <a:endParaRPr lang="en-GB"/>
           </a:p>
@@ -2928,7 +2934,7 @@
           <a:p>
             <a:fld id="{54232FB6-0DF2-4C19-B3B4-A0C039A1BAF7}" type="datetimeFigureOut">
               <a:rPr lang="en-GB" smtClean="0"/>
-              <a:t>18/07/2026</a:t>
+              <a:t>27/07/2026</a:t>
             </a:fld>
             <a:endParaRPr lang="en-GB"/>
           </a:p>
@@ -3664,6 +3670,98 @@
     <p:extLst>
       <p:ext uri="{BB962C8B-B14F-4D97-AF65-F5344CB8AC3E}">
         <p14:creationId xmlns:p14="http://schemas.microsoft.com/office/powerpoint/2010/main" val="279398525"/>
+      </p:ext>
+    </p:extLst>
+  </p:cSld>
+  <p:clrMapOvr>
+    <a:masterClrMapping/>
+  </p:clrMapOvr>
+</p:sld>
+</file>
+
+<file path=ppt/slides/slide5.xml><?xml version="1.0" encoding="utf-8"?>
+<p:sld xmlns:a="http://schemas.openxmlformats.org/drawingml/2006/main" xmlns:r="http://schemas.openxmlformats.org/officeDocument/2006/relationships" xmlns:p="http://schemas.openxmlformats.org/presentationml/2006/main">
+  <p:cSld>
+    <p:spTree>
+      <p:nvGrpSpPr>
+        <p:cNvPr id="1" name=""/>
+        <p:cNvGrpSpPr/>
+        <p:nvPr/>
+      </p:nvGrpSpPr>
+      <p:grpSpPr>
+        <a:xfrm>
+          <a:off x="0" y="0"/>
+          <a:ext cx="0" cy="0"/>
+          <a:chOff x="0" y="0"/>
+          <a:chExt cx="0" cy="0"/>
+        </a:xfrm>
+      </p:grpSpPr>
+      <p:sp>
+        <p:nvSpPr>
+          <p:cNvPr id="2" name="Title 1">
+            <a:extLst>
+              <a:ext uri="{FF2B5EF4-FFF2-40B4-BE49-F238E27FC236}">
+                <a16:creationId xmlns:a16="http://schemas.microsoft.com/office/drawing/2014/main" id="{1AA6C1A4-5782-BB90-F94F-657A81B6E7FE}"/>
+              </a:ext>
+            </a:extLst>
+          </p:cNvPr>
+          <p:cNvSpPr>
+            <a:spLocks noGrp="1"/>
+          </p:cNvSpPr>
+          <p:nvPr>
+            <p:ph type="title"/>
+          </p:nvPr>
+        </p:nvSpPr>
+        <p:spPr/>
+        <p:txBody>
+          <a:bodyPr/>
+          <a:lstStyle/>
+          <a:p>
+            <a:endParaRPr lang="en-GB" dirty="0"/>
+          </a:p>
+        </p:txBody>
+      </p:sp>
+      <p:sp>
+        <p:nvSpPr>
+          <p:cNvPr id="3" name="Content Placeholder 2">
+            <a:extLst>
+              <a:ext uri="{FF2B5EF4-FFF2-40B4-BE49-F238E27FC236}">
+                <a16:creationId xmlns:a16="http://schemas.microsoft.com/office/drawing/2014/main" id="{3792ECDD-A93C-B49C-2B95-4623494DFBFB}"/>
+              </a:ext>
+            </a:extLst>
+          </p:cNvPr>
+          <p:cNvSpPr>
+            <a:spLocks noGrp="1"/>
+          </p:cNvSpPr>
+          <p:nvPr>
+            <p:ph idx="1"/>
+          </p:nvPr>
+        </p:nvSpPr>
+        <p:spPr/>
+        <p:txBody>
+          <a:bodyPr/>
+          <a:lstStyle/>
+          <a:p>
+            <a:r>
+              <a:rPr lang="en-GB" dirty="0"/>
+              <a:t>Once E to free player – Black Screen – Next </a:t>
+            </a:r>
+            <a:r>
+              <a:rPr lang="en-GB" dirty="0" err="1"/>
+              <a:t>Prortype</a:t>
+            </a:r>
+            <a:r>
+              <a:rPr lang="en-GB"/>
+              <a:t> level loads </a:t>
+            </a:r>
+            <a:endParaRPr lang="en-GB" dirty="0"/>
+          </a:p>
+        </p:txBody>
+      </p:sp>
+    </p:spTree>
+    <p:extLst>
+      <p:ext uri="{BB962C8B-B14F-4D97-AF65-F5344CB8AC3E}">
+        <p14:creationId xmlns:p14="http://schemas.microsoft.com/office/powerpoint/2010/main" val="1318969707"/>
       </p:ext>
     </p:extLst>
   </p:cSld>

--- a/Project/1-LIGHTING.pptx
+++ b/Project/1-LIGHTING.pptx
@@ -8,8 +8,16 @@
     <p:sldId id="256" r:id="rId2"/>
     <p:sldId id="258" r:id="rId3"/>
     <p:sldId id="259" r:id="rId4"/>
-    <p:sldId id="257" r:id="rId5"/>
-    <p:sldId id="260" r:id="rId6"/>
+    <p:sldId id="261" r:id="rId5"/>
+    <p:sldId id="257" r:id="rId6"/>
+    <p:sldId id="263" r:id="rId7"/>
+    <p:sldId id="262" r:id="rId8"/>
+    <p:sldId id="264" r:id="rId9"/>
+    <p:sldId id="265" r:id="rId10"/>
+    <p:sldId id="260" r:id="rId11"/>
+    <p:sldId id="266" r:id="rId12"/>
+    <p:sldId id="267" r:id="rId13"/>
+    <p:sldId id="268" r:id="rId14"/>
   </p:sldIdLst>
   <p:sldSz cx="12192000" cy="6858000"/>
   <p:notesSz cx="6858000" cy="9144000"/>
@@ -265,7 +273,7 @@
           <a:p>
             <a:fld id="{54232FB6-0DF2-4C19-B3B4-A0C039A1BAF7}" type="datetimeFigureOut">
               <a:rPr lang="en-GB" smtClean="0"/>
-              <a:t>27/07/2026</a:t>
+              <a:t>06/08/2026</a:t>
             </a:fld>
             <a:endParaRPr lang="en-GB"/>
           </a:p>
@@ -465,7 +473,7 @@
           <a:p>
             <a:fld id="{54232FB6-0DF2-4C19-B3B4-A0C039A1BAF7}" type="datetimeFigureOut">
               <a:rPr lang="en-GB" smtClean="0"/>
-              <a:t>27/07/2026</a:t>
+              <a:t>06/08/2026</a:t>
             </a:fld>
             <a:endParaRPr lang="en-GB"/>
           </a:p>
@@ -675,7 +683,7 @@
           <a:p>
             <a:fld id="{54232FB6-0DF2-4C19-B3B4-A0C039A1BAF7}" type="datetimeFigureOut">
               <a:rPr lang="en-GB" smtClean="0"/>
-              <a:t>27/07/2026</a:t>
+              <a:t>06/08/2026</a:t>
             </a:fld>
             <a:endParaRPr lang="en-GB"/>
           </a:p>
@@ -875,7 +883,7 @@
           <a:p>
             <a:fld id="{54232FB6-0DF2-4C19-B3B4-A0C039A1BAF7}" type="datetimeFigureOut">
               <a:rPr lang="en-GB" smtClean="0"/>
-              <a:t>27/07/2026</a:t>
+              <a:t>06/08/2026</a:t>
             </a:fld>
             <a:endParaRPr lang="en-GB"/>
           </a:p>
@@ -1151,7 +1159,7 @@
           <a:p>
             <a:fld id="{54232FB6-0DF2-4C19-B3B4-A0C039A1BAF7}" type="datetimeFigureOut">
               <a:rPr lang="en-GB" smtClean="0"/>
-              <a:t>27/07/2026</a:t>
+              <a:t>06/08/2026</a:t>
             </a:fld>
             <a:endParaRPr lang="en-GB"/>
           </a:p>
@@ -1419,7 +1427,7 @@
           <a:p>
             <a:fld id="{54232FB6-0DF2-4C19-B3B4-A0C039A1BAF7}" type="datetimeFigureOut">
               <a:rPr lang="en-GB" smtClean="0"/>
-              <a:t>27/07/2026</a:t>
+              <a:t>06/08/2026</a:t>
             </a:fld>
             <a:endParaRPr lang="en-GB"/>
           </a:p>
@@ -1834,7 +1842,7 @@
           <a:p>
             <a:fld id="{54232FB6-0DF2-4C19-B3B4-A0C039A1BAF7}" type="datetimeFigureOut">
               <a:rPr lang="en-GB" smtClean="0"/>
-              <a:t>27/07/2026</a:t>
+              <a:t>06/08/2026</a:t>
             </a:fld>
             <a:endParaRPr lang="en-GB"/>
           </a:p>
@@ -1976,7 +1984,7 @@
           <a:p>
             <a:fld id="{54232FB6-0DF2-4C19-B3B4-A0C039A1BAF7}" type="datetimeFigureOut">
               <a:rPr lang="en-GB" smtClean="0"/>
-              <a:t>27/07/2026</a:t>
+              <a:t>06/08/2026</a:t>
             </a:fld>
             <a:endParaRPr lang="en-GB"/>
           </a:p>
@@ -2089,7 +2097,7 @@
           <a:p>
             <a:fld id="{54232FB6-0DF2-4C19-B3B4-A0C039A1BAF7}" type="datetimeFigureOut">
               <a:rPr lang="en-GB" smtClean="0"/>
-              <a:t>27/07/2026</a:t>
+              <a:t>06/08/2026</a:t>
             </a:fld>
             <a:endParaRPr lang="en-GB"/>
           </a:p>
@@ -2402,7 +2410,7 @@
           <a:p>
             <a:fld id="{54232FB6-0DF2-4C19-B3B4-A0C039A1BAF7}" type="datetimeFigureOut">
               <a:rPr lang="en-GB" smtClean="0"/>
-              <a:t>27/07/2026</a:t>
+              <a:t>06/08/2026</a:t>
             </a:fld>
             <a:endParaRPr lang="en-GB"/>
           </a:p>
@@ -2691,7 +2699,7 @@
           <a:p>
             <a:fld id="{54232FB6-0DF2-4C19-B3B4-A0C039A1BAF7}" type="datetimeFigureOut">
               <a:rPr lang="en-GB" smtClean="0"/>
-              <a:t>27/07/2026</a:t>
+              <a:t>06/08/2026</a:t>
             </a:fld>
             <a:endParaRPr lang="en-GB"/>
           </a:p>
@@ -2934,7 +2942,7 @@
           <a:p>
             <a:fld id="{54232FB6-0DF2-4C19-B3B4-A0C039A1BAF7}" type="datetimeFigureOut">
               <a:rPr lang="en-GB" smtClean="0"/>
-              <a:t>27/07/2026</a:t>
+              <a:t>06/08/2026</a:t>
             </a:fld>
             <a:endParaRPr lang="en-GB"/>
           </a:p>
@@ -3414,6 +3422,515 @@
 </p:sld>
 </file>
 
+<file path=ppt/slides/slide10.xml><?xml version="1.0" encoding="utf-8"?>
+<p:sld xmlns:a="http://schemas.openxmlformats.org/drawingml/2006/main" xmlns:r="http://schemas.openxmlformats.org/officeDocument/2006/relationships" xmlns:p="http://schemas.openxmlformats.org/presentationml/2006/main">
+  <p:cSld>
+    <p:spTree>
+      <p:nvGrpSpPr>
+        <p:cNvPr id="1" name=""/>
+        <p:cNvGrpSpPr/>
+        <p:nvPr/>
+      </p:nvGrpSpPr>
+      <p:grpSpPr>
+        <a:xfrm>
+          <a:off x="0" y="0"/>
+          <a:ext cx="0" cy="0"/>
+          <a:chOff x="0" y="0"/>
+          <a:chExt cx="0" cy="0"/>
+        </a:xfrm>
+      </p:grpSpPr>
+      <p:sp>
+        <p:nvSpPr>
+          <p:cNvPr id="2" name="Title 1">
+            <a:extLst>
+              <a:ext uri="{FF2B5EF4-FFF2-40B4-BE49-F238E27FC236}">
+                <a16:creationId xmlns:a16="http://schemas.microsoft.com/office/drawing/2014/main" id="{1AA6C1A4-5782-BB90-F94F-657A81B6E7FE}"/>
+              </a:ext>
+            </a:extLst>
+          </p:cNvPr>
+          <p:cNvSpPr>
+            <a:spLocks noGrp="1"/>
+          </p:cNvSpPr>
+          <p:nvPr>
+            <p:ph type="title"/>
+          </p:nvPr>
+        </p:nvSpPr>
+        <p:spPr/>
+        <p:txBody>
+          <a:bodyPr/>
+          <a:lstStyle/>
+          <a:p>
+            <a:endParaRPr lang="en-GB" dirty="0"/>
+          </a:p>
+        </p:txBody>
+      </p:sp>
+      <p:sp>
+        <p:nvSpPr>
+          <p:cNvPr id="3" name="Content Placeholder 2">
+            <a:extLst>
+              <a:ext uri="{FF2B5EF4-FFF2-40B4-BE49-F238E27FC236}">
+                <a16:creationId xmlns:a16="http://schemas.microsoft.com/office/drawing/2014/main" id="{3792ECDD-A93C-B49C-2B95-4623494DFBFB}"/>
+              </a:ext>
+            </a:extLst>
+          </p:cNvPr>
+          <p:cNvSpPr>
+            <a:spLocks noGrp="1"/>
+          </p:cNvSpPr>
+          <p:nvPr>
+            <p:ph idx="1"/>
+          </p:nvPr>
+        </p:nvSpPr>
+        <p:spPr/>
+        <p:txBody>
+          <a:bodyPr/>
+          <a:lstStyle/>
+          <a:p>
+            <a:r>
+              <a:rPr lang="en-GB" dirty="0"/>
+              <a:t>Once E to free player – Black Screen – Next </a:t>
+            </a:r>
+            <a:r>
+              <a:rPr lang="en-GB" dirty="0" err="1"/>
+              <a:t>Prortype</a:t>
+            </a:r>
+            <a:r>
+              <a:rPr lang="en-GB" dirty="0"/>
+              <a:t> level loads </a:t>
+            </a:r>
+          </a:p>
+        </p:txBody>
+      </p:sp>
+      <p:pic>
+        <p:nvPicPr>
+          <p:cNvPr id="5" name="Picture 4">
+            <a:extLst>
+              <a:ext uri="{FF2B5EF4-FFF2-40B4-BE49-F238E27FC236}">
+                <a16:creationId xmlns:a16="http://schemas.microsoft.com/office/drawing/2014/main" id="{F29830D5-F174-CE37-5F8C-5D21583DE119}"/>
+              </a:ext>
+            </a:extLst>
+          </p:cNvPr>
+          <p:cNvPicPr>
+            <a:picLocks noChangeAspect="1"/>
+          </p:cNvPicPr>
+          <p:nvPr/>
+        </p:nvPicPr>
+        <p:blipFill>
+          <a:blip r:embed="rId2"/>
+          <a:stretch>
+            <a:fillRect/>
+          </a:stretch>
+        </p:blipFill>
+        <p:spPr>
+          <a:xfrm>
+            <a:off x="1625211" y="1334377"/>
+            <a:ext cx="8433493" cy="4189246"/>
+          </a:xfrm>
+          <a:prstGeom prst="rect">
+            <a:avLst/>
+          </a:prstGeom>
+        </p:spPr>
+      </p:pic>
+    </p:spTree>
+    <p:extLst>
+      <p:ext uri="{BB962C8B-B14F-4D97-AF65-F5344CB8AC3E}">
+        <p14:creationId xmlns:p14="http://schemas.microsoft.com/office/powerpoint/2010/main" val="1318969707"/>
+      </p:ext>
+    </p:extLst>
+  </p:cSld>
+  <p:clrMapOvr>
+    <a:masterClrMapping/>
+  </p:clrMapOvr>
+</p:sld>
+</file>
+
+<file path=ppt/slides/slide11.xml><?xml version="1.0" encoding="utf-8"?>
+<p:sld xmlns:a="http://schemas.openxmlformats.org/drawingml/2006/main" xmlns:r="http://schemas.openxmlformats.org/officeDocument/2006/relationships" xmlns:p="http://schemas.openxmlformats.org/presentationml/2006/main">
+  <p:cSld>
+    <p:spTree>
+      <p:nvGrpSpPr>
+        <p:cNvPr id="1" name=""/>
+        <p:cNvGrpSpPr/>
+        <p:nvPr/>
+      </p:nvGrpSpPr>
+      <p:grpSpPr>
+        <a:xfrm>
+          <a:off x="0" y="0"/>
+          <a:ext cx="0" cy="0"/>
+          <a:chOff x="0" y="0"/>
+          <a:chExt cx="0" cy="0"/>
+        </a:xfrm>
+      </p:grpSpPr>
+      <p:sp>
+        <p:nvSpPr>
+          <p:cNvPr id="2" name="Title 1">
+            <a:extLst>
+              <a:ext uri="{FF2B5EF4-FFF2-40B4-BE49-F238E27FC236}">
+                <a16:creationId xmlns:a16="http://schemas.microsoft.com/office/drawing/2014/main" id="{1CFF5DB5-FD69-24B5-52D6-379D2A321F98}"/>
+              </a:ext>
+            </a:extLst>
+          </p:cNvPr>
+          <p:cNvSpPr>
+            <a:spLocks noGrp="1"/>
+          </p:cNvSpPr>
+          <p:nvPr>
+            <p:ph type="title"/>
+          </p:nvPr>
+        </p:nvSpPr>
+        <p:spPr/>
+        <p:txBody>
+          <a:bodyPr/>
+          <a:lstStyle/>
+          <a:p>
+            <a:r>
+              <a:rPr lang="en-GB" dirty="0"/>
+              <a:t>Prototype 2: Architectural Guidance </a:t>
+            </a:r>
+          </a:p>
+        </p:txBody>
+      </p:sp>
+      <p:sp>
+        <p:nvSpPr>
+          <p:cNvPr id="3" name="Content Placeholder 2">
+            <a:extLst>
+              <a:ext uri="{FF2B5EF4-FFF2-40B4-BE49-F238E27FC236}">
+                <a16:creationId xmlns:a16="http://schemas.microsoft.com/office/drawing/2014/main" id="{B5B23B49-71DE-394E-D3E2-803A71BF0094}"/>
+              </a:ext>
+            </a:extLst>
+          </p:cNvPr>
+          <p:cNvSpPr>
+            <a:spLocks noGrp="1"/>
+          </p:cNvSpPr>
+          <p:nvPr>
+            <p:ph idx="1"/>
+          </p:nvPr>
+        </p:nvSpPr>
+        <p:spPr/>
+        <p:txBody>
+          <a:bodyPr/>
+          <a:lstStyle/>
+          <a:p>
+            <a:r>
+              <a:rPr lang="en-GB" dirty="0"/>
+              <a:t>Path Width – </a:t>
+            </a:r>
+          </a:p>
+          <a:p>
+            <a:r>
+              <a:rPr lang="en-GB" dirty="0"/>
+              <a:t>Framing – Using Architecture to frame the objective</a:t>
+            </a:r>
+          </a:p>
+          <a:p>
+            <a:r>
+              <a:rPr lang="en-GB" dirty="0"/>
+              <a:t>Occlusion – Hide things until the right moment </a:t>
+            </a:r>
+          </a:p>
+          <a:p>
+            <a:r>
+              <a:rPr lang="en-GB" dirty="0"/>
+              <a:t>Natural Funnels – </a:t>
+            </a:r>
+          </a:p>
+          <a:p>
+            <a:r>
+              <a:rPr lang="en-GB" dirty="0"/>
+              <a:t>Gateways – Doorways psychologically tell players to continue </a:t>
+            </a:r>
+          </a:p>
+          <a:p>
+            <a:r>
+              <a:rPr lang="en-GB" dirty="0"/>
+              <a:t>Curved Paths – Straight lines reveal everything , curves create curiosity </a:t>
+            </a:r>
+          </a:p>
+        </p:txBody>
+      </p:sp>
+    </p:spTree>
+    <p:extLst>
+      <p:ext uri="{BB962C8B-B14F-4D97-AF65-F5344CB8AC3E}">
+        <p14:creationId xmlns:p14="http://schemas.microsoft.com/office/powerpoint/2010/main" val="20693960"/>
+      </p:ext>
+    </p:extLst>
+  </p:cSld>
+  <p:clrMapOvr>
+    <a:masterClrMapping/>
+  </p:clrMapOvr>
+</p:sld>
+</file>
+
+<file path=ppt/slides/slide12.xml><?xml version="1.0" encoding="utf-8"?>
+<p:sld xmlns:a="http://schemas.openxmlformats.org/drawingml/2006/main" xmlns:r="http://schemas.openxmlformats.org/officeDocument/2006/relationships" xmlns:p="http://schemas.openxmlformats.org/presentationml/2006/main">
+  <p:cSld>
+    <p:spTree>
+      <p:nvGrpSpPr>
+        <p:cNvPr id="1" name=""/>
+        <p:cNvGrpSpPr/>
+        <p:nvPr/>
+      </p:nvGrpSpPr>
+      <p:grpSpPr>
+        <a:xfrm>
+          <a:off x="0" y="0"/>
+          <a:ext cx="0" cy="0"/>
+          <a:chOff x="0" y="0"/>
+          <a:chExt cx="0" cy="0"/>
+        </a:xfrm>
+      </p:grpSpPr>
+      <p:sp>
+        <p:nvSpPr>
+          <p:cNvPr id="2" name="Title 1">
+            <a:extLst>
+              <a:ext uri="{FF2B5EF4-FFF2-40B4-BE49-F238E27FC236}">
+                <a16:creationId xmlns:a16="http://schemas.microsoft.com/office/drawing/2014/main" id="{0AF1679A-F735-1C71-219A-9C49D1048BE8}"/>
+              </a:ext>
+            </a:extLst>
+          </p:cNvPr>
+          <p:cNvSpPr>
+            <a:spLocks noGrp="1"/>
+          </p:cNvSpPr>
+          <p:nvPr>
+            <p:ph type="title"/>
+          </p:nvPr>
+        </p:nvSpPr>
+        <p:spPr/>
+        <p:txBody>
+          <a:bodyPr/>
+          <a:lstStyle/>
+          <a:p>
+            <a:r>
+              <a:rPr lang="en-GB" dirty="0"/>
+              <a:t>How to test </a:t>
+            </a:r>
+          </a:p>
+        </p:txBody>
+      </p:sp>
+      <p:sp>
+        <p:nvSpPr>
+          <p:cNvPr id="3" name="Content Placeholder 2">
+            <a:extLst>
+              <a:ext uri="{FF2B5EF4-FFF2-40B4-BE49-F238E27FC236}">
+                <a16:creationId xmlns:a16="http://schemas.microsoft.com/office/drawing/2014/main" id="{E0BB5BEE-44E1-3C1C-DD45-974699A66AEF}"/>
+              </a:ext>
+            </a:extLst>
+          </p:cNvPr>
+          <p:cNvSpPr>
+            <a:spLocks noGrp="1"/>
+          </p:cNvSpPr>
+          <p:nvPr>
+            <p:ph idx="1"/>
+          </p:nvPr>
+        </p:nvSpPr>
+        <p:spPr/>
+        <p:txBody>
+          <a:bodyPr>
+            <a:normAutofit fontScale="77500" lnSpcReduction="20000"/>
+          </a:bodyPr>
+          <a:lstStyle/>
+          <a:p>
+            <a:r>
+              <a:rPr lang="en-GB" dirty="0"/>
+              <a:t>If players say things like</a:t>
+            </a:r>
+          </a:p>
+          <a:p>
+            <a:r>
+              <a:rPr lang="en-GB" dirty="0"/>
+              <a:t>I just Followed the Path </a:t>
+            </a:r>
+          </a:p>
+          <a:p>
+            <a:r>
+              <a:rPr lang="en-GB" dirty="0"/>
+              <a:t>It felt like the obvious way </a:t>
+            </a:r>
+          </a:p>
+          <a:p>
+            <a:r>
+              <a:rPr lang="en-GB" dirty="0"/>
+              <a:t>Ask questions like:</a:t>
+            </a:r>
+          </a:p>
+          <a:p>
+            <a:pPr lvl="0"/>
+            <a:r>
+              <a:rPr lang="en-GB" dirty="0"/>
+              <a:t>Which path did you choose first? </a:t>
+            </a:r>
+          </a:p>
+          <a:p>
+            <a:pPr lvl="0"/>
+            <a:r>
+              <a:rPr lang="en-GB" dirty="0"/>
+              <a:t>Why did you choose it? </a:t>
+            </a:r>
+          </a:p>
+          <a:p>
+            <a:pPr lvl="0"/>
+            <a:r>
+              <a:rPr lang="en-GB" dirty="0"/>
+              <a:t>Did any part of the environment influence your decision? </a:t>
+            </a:r>
+          </a:p>
+          <a:p>
+            <a:pPr lvl="0"/>
+            <a:r>
+              <a:rPr lang="en-GB" dirty="0"/>
+              <a:t>Did you ever feel lost? </a:t>
+            </a:r>
+          </a:p>
+          <a:p>
+            <a:pPr lvl="0"/>
+            <a:r>
+              <a:rPr lang="en-GB" dirty="0"/>
+              <a:t>Did the layout naturally guide you? </a:t>
+            </a:r>
+          </a:p>
+          <a:p>
+            <a:r>
+              <a:rPr lang="en-GB" dirty="0"/>
+              <a:t>If people answer:</a:t>
+            </a:r>
+          </a:p>
+          <a:p>
+            <a:r>
+              <a:rPr lang="en-GB" dirty="0"/>
+              <a:t>"It just felt like the correct path."</a:t>
+            </a:r>
+          </a:p>
+          <a:p>
+            <a:r>
+              <a:rPr lang="en-GB" dirty="0"/>
+              <a:t>then your architectural guidance worked.</a:t>
+            </a:r>
+          </a:p>
+          <a:p>
+            <a:endParaRPr lang="en-GB" dirty="0"/>
+          </a:p>
+        </p:txBody>
+      </p:sp>
+    </p:spTree>
+    <p:extLst>
+      <p:ext uri="{BB962C8B-B14F-4D97-AF65-F5344CB8AC3E}">
+        <p14:creationId xmlns:p14="http://schemas.microsoft.com/office/powerpoint/2010/main" val="4037157585"/>
+      </p:ext>
+    </p:extLst>
+  </p:cSld>
+  <p:clrMapOvr>
+    <a:masterClrMapping/>
+  </p:clrMapOvr>
+</p:sld>
+</file>
+
+<file path=ppt/slides/slide13.xml><?xml version="1.0" encoding="utf-8"?>
+<p:sld xmlns:a="http://schemas.openxmlformats.org/drawingml/2006/main" xmlns:r="http://schemas.openxmlformats.org/officeDocument/2006/relationships" xmlns:p="http://schemas.openxmlformats.org/presentationml/2006/main">
+  <p:cSld>
+    <p:spTree>
+      <p:nvGrpSpPr>
+        <p:cNvPr id="1" name=""/>
+        <p:cNvGrpSpPr/>
+        <p:nvPr/>
+      </p:nvGrpSpPr>
+      <p:grpSpPr>
+        <a:xfrm>
+          <a:off x="0" y="0"/>
+          <a:ext cx="0" cy="0"/>
+          <a:chOff x="0" y="0"/>
+          <a:chExt cx="0" cy="0"/>
+        </a:xfrm>
+      </p:grpSpPr>
+      <p:sp>
+        <p:nvSpPr>
+          <p:cNvPr id="2" name="Title 1">
+            <a:extLst>
+              <a:ext uri="{FF2B5EF4-FFF2-40B4-BE49-F238E27FC236}">
+                <a16:creationId xmlns:a16="http://schemas.microsoft.com/office/drawing/2014/main" id="{C0FD8EF3-A5F2-E802-1213-75472660A5DE}"/>
+              </a:ext>
+            </a:extLst>
+          </p:cNvPr>
+          <p:cNvSpPr>
+            <a:spLocks noGrp="1"/>
+          </p:cNvSpPr>
+          <p:nvPr>
+            <p:ph type="title"/>
+          </p:nvPr>
+        </p:nvSpPr>
+        <p:spPr/>
+        <p:txBody>
+          <a:bodyPr/>
+          <a:lstStyle/>
+          <a:p>
+            <a:endParaRPr lang="en-GB"/>
+          </a:p>
+        </p:txBody>
+      </p:sp>
+      <p:sp>
+        <p:nvSpPr>
+          <p:cNvPr id="3" name="Content Placeholder 2">
+            <a:extLst>
+              <a:ext uri="{FF2B5EF4-FFF2-40B4-BE49-F238E27FC236}">
+                <a16:creationId xmlns:a16="http://schemas.microsoft.com/office/drawing/2014/main" id="{8C0D5A29-8554-302D-6080-6E3D19FE601B}"/>
+              </a:ext>
+            </a:extLst>
+          </p:cNvPr>
+          <p:cNvSpPr>
+            <a:spLocks noGrp="1"/>
+          </p:cNvSpPr>
+          <p:nvPr>
+            <p:ph idx="1"/>
+          </p:nvPr>
+        </p:nvSpPr>
+        <p:spPr/>
+        <p:txBody>
+          <a:bodyPr/>
+          <a:lstStyle/>
+          <a:p>
+            <a:endParaRPr lang="en-GB"/>
+          </a:p>
+        </p:txBody>
+      </p:sp>
+      <p:pic>
+        <p:nvPicPr>
+          <p:cNvPr id="5" name="Picture 4">
+            <a:extLst>
+              <a:ext uri="{FF2B5EF4-FFF2-40B4-BE49-F238E27FC236}">
+                <a16:creationId xmlns:a16="http://schemas.microsoft.com/office/drawing/2014/main" id="{46551A11-0692-BFB0-5A8B-EE6624BE9729}"/>
+              </a:ext>
+            </a:extLst>
+          </p:cNvPr>
+          <p:cNvPicPr>
+            <a:picLocks noChangeAspect="1"/>
+          </p:cNvPicPr>
+          <p:nvPr/>
+        </p:nvPicPr>
+        <p:blipFill>
+          <a:blip r:embed="rId2"/>
+          <a:stretch>
+            <a:fillRect/>
+          </a:stretch>
+        </p:blipFill>
+        <p:spPr>
+          <a:xfrm>
+            <a:off x="1933506" y="1825625"/>
+            <a:ext cx="7331075" cy="2568163"/>
+          </a:xfrm>
+          <a:prstGeom prst="rect">
+            <a:avLst/>
+          </a:prstGeom>
+        </p:spPr>
+      </p:pic>
+    </p:spTree>
+    <p:extLst>
+      <p:ext uri="{BB962C8B-B14F-4D97-AF65-F5344CB8AC3E}">
+        <p14:creationId xmlns:p14="http://schemas.microsoft.com/office/powerpoint/2010/main" val="3600737489"/>
+      </p:ext>
+    </p:extLst>
+  </p:cSld>
+  <p:clrMapOvr>
+    <a:masterClrMapping/>
+  </p:clrMapOvr>
+</p:sld>
+</file>
+
 <file path=ppt/slides/slide2.xml><?xml version="1.0" encoding="utf-8"?>
 <p:sld xmlns:a="http://schemas.openxmlformats.org/drawingml/2006/main" xmlns:r="http://schemas.openxmlformats.org/officeDocument/2006/relationships" xmlns:p="http://schemas.openxmlformats.org/presentationml/2006/main">
   <p:cSld>
@@ -3611,7 +4128,7 @@
           <p:cNvPr id="2" name="Title 1">
             <a:extLst>
               <a:ext uri="{FF2B5EF4-FFF2-40B4-BE49-F238E27FC236}">
-                <a16:creationId xmlns:a16="http://schemas.microsoft.com/office/drawing/2014/main" id="{AB765862-568D-A216-0602-95E0223FA304}"/>
+                <a16:creationId xmlns:a16="http://schemas.microsoft.com/office/drawing/2014/main" id="{72FFA02E-6F16-9114-129C-34D6D7E82611}"/>
               </a:ext>
             </a:extLst>
           </p:cNvPr>
@@ -3629,7 +4146,7 @@
           <a:p>
             <a:r>
               <a:rPr lang="en-GB" dirty="0"/>
-              <a:t>Not sure if this counts but particle effects </a:t>
+              <a:t>Forks</a:t>
             </a:r>
           </a:p>
         </p:txBody>
@@ -3639,7 +4156,7 @@
           <p:cNvPr id="3" name="Content Placeholder 2">
             <a:extLst>
               <a:ext uri="{FF2B5EF4-FFF2-40B4-BE49-F238E27FC236}">
-                <a16:creationId xmlns:a16="http://schemas.microsoft.com/office/drawing/2014/main" id="{FE7A707F-C485-100A-22B0-65C6ADE50B00}"/>
+                <a16:creationId xmlns:a16="http://schemas.microsoft.com/office/drawing/2014/main" id="{60E4B832-F473-41B7-CBDF-2A3B5229FB5F}"/>
               </a:ext>
             </a:extLst>
           </p:cNvPr>
@@ -3652,24 +4169,55 @@
         </p:nvSpPr>
         <p:spPr/>
         <p:txBody>
-          <a:bodyPr/>
-          <a:lstStyle/>
-          <a:p>
-            <a:r>
-              <a:rPr lang="en-GB" dirty="0" err="1"/>
-              <a:t>Colourd</a:t>
-            </a:r>
+          <a:bodyPr>
+            <a:normAutofit lnSpcReduction="10000"/>
+          </a:bodyPr>
+          <a:lstStyle/>
+          <a:p>
             <a:r>
               <a:rPr lang="en-GB" dirty="0"/>
-              <a:t>. Emits smoke and sparks from generator </a:t>
-            </a:r>
+              <a:t>“Forks” (Decisions)</a:t>
+            </a:r>
+          </a:p>
+          <a:p>
+            <a:r>
+              <a:rPr lang="en-GB" dirty="0"/>
+              <a:t>I need to test guidance and for that I will need a few “forks” </a:t>
+            </a:r>
+          </a:p>
+          <a:p>
+            <a:r>
+              <a:rPr lang="en-GB" dirty="0"/>
+              <a:t>If there are no decisions to make than the user will eventually reach the generator regardless of the lighting, because of this I need to include decisions that I can also utilise lighting in to help guide the player to the correct choice </a:t>
+            </a:r>
+          </a:p>
+          <a:p>
+            <a:r>
+              <a:rPr lang="en-GB" dirty="0"/>
+              <a:t>Example </a:t>
+            </a:r>
+          </a:p>
+          <a:p>
+            <a:r>
+              <a:rPr lang="en-GB" dirty="0"/>
+              <a:t>The correct path has warm light, brighter environment, light spilling over wall</a:t>
+            </a:r>
+          </a:p>
+          <a:p>
+            <a:r>
+              <a:rPr lang="en-GB" dirty="0"/>
+              <a:t>The dead end has no visual interest, darker, no emitting lights </a:t>
+            </a:r>
+          </a:p>
+          <a:p>
+            <a:endParaRPr lang="en-GB" dirty="0"/>
           </a:p>
         </p:txBody>
       </p:sp>
     </p:spTree>
     <p:extLst>
       <p:ext uri="{BB962C8B-B14F-4D97-AF65-F5344CB8AC3E}">
-        <p14:creationId xmlns:p14="http://schemas.microsoft.com/office/powerpoint/2010/main" val="279398525"/>
+        <p14:creationId xmlns:p14="http://schemas.microsoft.com/office/powerpoint/2010/main" val="1064996124"/>
       </p:ext>
     </p:extLst>
   </p:cSld>
@@ -3701,7 +4249,7 @@
           <p:cNvPr id="2" name="Title 1">
             <a:extLst>
               <a:ext uri="{FF2B5EF4-FFF2-40B4-BE49-F238E27FC236}">
-                <a16:creationId xmlns:a16="http://schemas.microsoft.com/office/drawing/2014/main" id="{1AA6C1A4-5782-BB90-F94F-657A81B6E7FE}"/>
+                <a16:creationId xmlns:a16="http://schemas.microsoft.com/office/drawing/2014/main" id="{AB765862-568D-A216-0602-95E0223FA304}"/>
               </a:ext>
             </a:extLst>
           </p:cNvPr>
@@ -3726,7 +4274,7 @@
           <p:cNvPr id="3" name="Content Placeholder 2">
             <a:extLst>
               <a:ext uri="{FF2B5EF4-FFF2-40B4-BE49-F238E27FC236}">
-                <a16:creationId xmlns:a16="http://schemas.microsoft.com/office/drawing/2014/main" id="{3792ECDD-A93C-B49C-2B95-4623494DFBFB}"/>
+                <a16:creationId xmlns:a16="http://schemas.microsoft.com/office/drawing/2014/main" id="{FE7A707F-C485-100A-22B0-65C6ADE50B00}"/>
               </a:ext>
             </a:extLst>
           </p:cNvPr>
@@ -3742,26 +4290,401 @@
           <a:bodyPr/>
           <a:lstStyle/>
           <a:p>
-            <a:r>
-              <a:rPr lang="en-GB" dirty="0"/>
-              <a:t>Once E to free player – Black Screen – Next </a:t>
-            </a:r>
-            <a:r>
-              <a:rPr lang="en-GB" dirty="0" err="1"/>
-              <a:t>Prortype</a:t>
-            </a:r>
-            <a:r>
-              <a:rPr lang="en-GB"/>
-              <a:t> level loads </a:t>
-            </a:r>
             <a:endParaRPr lang="en-GB" dirty="0"/>
           </a:p>
         </p:txBody>
       </p:sp>
+      <p:pic>
+        <p:nvPicPr>
+          <p:cNvPr id="5" name="Picture 4">
+            <a:extLst>
+              <a:ext uri="{FF2B5EF4-FFF2-40B4-BE49-F238E27FC236}">
+                <a16:creationId xmlns:a16="http://schemas.microsoft.com/office/drawing/2014/main" id="{FB44003D-1BA4-3DA6-A456-973EE03F0807}"/>
+              </a:ext>
+            </a:extLst>
+          </p:cNvPr>
+          <p:cNvPicPr>
+            <a:picLocks noChangeAspect="1"/>
+          </p:cNvPicPr>
+          <p:nvPr/>
+        </p:nvPicPr>
+        <p:blipFill>
+          <a:blip r:embed="rId2"/>
+          <a:stretch>
+            <a:fillRect/>
+          </a:stretch>
+        </p:blipFill>
+        <p:spPr>
+          <a:xfrm>
+            <a:off x="1874521" y="225655"/>
+            <a:ext cx="7893260" cy="6433895"/>
+          </a:xfrm>
+          <a:prstGeom prst="rect">
+            <a:avLst/>
+          </a:prstGeom>
+        </p:spPr>
+      </p:pic>
     </p:spTree>
     <p:extLst>
       <p:ext uri="{BB962C8B-B14F-4D97-AF65-F5344CB8AC3E}">
-        <p14:creationId xmlns:p14="http://schemas.microsoft.com/office/powerpoint/2010/main" val="1318969707"/>
+        <p14:creationId xmlns:p14="http://schemas.microsoft.com/office/powerpoint/2010/main" val="279398525"/>
+      </p:ext>
+    </p:extLst>
+  </p:cSld>
+  <p:clrMapOvr>
+    <a:masterClrMapping/>
+  </p:clrMapOvr>
+</p:sld>
+</file>
+
+<file path=ppt/slides/slide6.xml><?xml version="1.0" encoding="utf-8"?>
+<p:sld xmlns:a="http://schemas.openxmlformats.org/drawingml/2006/main" xmlns:r="http://schemas.openxmlformats.org/officeDocument/2006/relationships" xmlns:p="http://schemas.openxmlformats.org/presentationml/2006/main">
+  <p:cSld>
+    <p:spTree>
+      <p:nvGrpSpPr>
+        <p:cNvPr id="1" name=""/>
+        <p:cNvGrpSpPr/>
+        <p:nvPr/>
+      </p:nvGrpSpPr>
+      <p:grpSpPr>
+        <a:xfrm>
+          <a:off x="0" y="0"/>
+          <a:ext cx="0" cy="0"/>
+          <a:chOff x="0" y="0"/>
+          <a:chExt cx="0" cy="0"/>
+        </a:xfrm>
+      </p:grpSpPr>
+      <p:sp>
+        <p:nvSpPr>
+          <p:cNvPr id="2" name="Title 1">
+            <a:extLst>
+              <a:ext uri="{FF2B5EF4-FFF2-40B4-BE49-F238E27FC236}">
+                <a16:creationId xmlns:a16="http://schemas.microsoft.com/office/drawing/2014/main" id="{A5B45E80-D85F-C881-89C9-D8651AF68D7E}"/>
+              </a:ext>
+            </a:extLst>
+          </p:cNvPr>
+          <p:cNvSpPr>
+            <a:spLocks noGrp="1"/>
+          </p:cNvSpPr>
+          <p:nvPr>
+            <p:ph type="title"/>
+          </p:nvPr>
+        </p:nvSpPr>
+        <p:spPr/>
+        <p:txBody>
+          <a:bodyPr/>
+          <a:lstStyle/>
+          <a:p>
+            <a:r>
+              <a:rPr lang="en-GB" dirty="0"/>
+              <a:t>1. Grey box in light </a:t>
+            </a:r>
+          </a:p>
+        </p:txBody>
+      </p:sp>
+      <p:pic>
+        <p:nvPicPr>
+          <p:cNvPr id="5" name="Picture 4">
+            <a:extLst>
+              <a:ext uri="{FF2B5EF4-FFF2-40B4-BE49-F238E27FC236}">
+                <a16:creationId xmlns:a16="http://schemas.microsoft.com/office/drawing/2014/main" id="{5B4801FB-CEA4-B713-2508-B2E55EB81384}"/>
+              </a:ext>
+            </a:extLst>
+          </p:cNvPr>
+          <p:cNvPicPr>
+            <a:picLocks noChangeAspect="1"/>
+          </p:cNvPicPr>
+          <p:nvPr/>
+        </p:nvPicPr>
+        <p:blipFill>
+          <a:blip r:embed="rId2"/>
+          <a:stretch>
+            <a:fillRect/>
+          </a:stretch>
+        </p:blipFill>
+        <p:spPr>
+          <a:xfrm>
+            <a:off x="665963" y="1843912"/>
+            <a:ext cx="10860074" cy="4227703"/>
+          </a:xfrm>
+          <a:prstGeom prst="rect">
+            <a:avLst/>
+          </a:prstGeom>
+        </p:spPr>
+      </p:pic>
+    </p:spTree>
+    <p:extLst>
+      <p:ext uri="{BB962C8B-B14F-4D97-AF65-F5344CB8AC3E}">
+        <p14:creationId xmlns:p14="http://schemas.microsoft.com/office/powerpoint/2010/main" val="601528651"/>
+      </p:ext>
+    </p:extLst>
+  </p:cSld>
+  <p:clrMapOvr>
+    <a:masterClrMapping/>
+  </p:clrMapOvr>
+</p:sld>
+</file>
+
+<file path=ppt/slides/slide7.xml><?xml version="1.0" encoding="utf-8"?>
+<p:sld xmlns:a="http://schemas.openxmlformats.org/drawingml/2006/main" xmlns:r="http://schemas.openxmlformats.org/officeDocument/2006/relationships" xmlns:p="http://schemas.openxmlformats.org/presentationml/2006/main">
+  <p:cSld>
+    <p:spTree>
+      <p:nvGrpSpPr>
+        <p:cNvPr id="1" name=""/>
+        <p:cNvGrpSpPr/>
+        <p:nvPr/>
+      </p:nvGrpSpPr>
+      <p:grpSpPr>
+        <a:xfrm>
+          <a:off x="0" y="0"/>
+          <a:ext cx="0" cy="0"/>
+          <a:chOff x="0" y="0"/>
+          <a:chExt cx="0" cy="0"/>
+        </a:xfrm>
+      </p:grpSpPr>
+      <p:sp>
+        <p:nvSpPr>
+          <p:cNvPr id="2" name="Title 1">
+            <a:extLst>
+              <a:ext uri="{FF2B5EF4-FFF2-40B4-BE49-F238E27FC236}">
+                <a16:creationId xmlns:a16="http://schemas.microsoft.com/office/drawing/2014/main" id="{53DA8236-D928-4E8E-005C-678C6E5B3CC9}"/>
+              </a:ext>
+            </a:extLst>
+          </p:cNvPr>
+          <p:cNvSpPr>
+            <a:spLocks noGrp="1"/>
+          </p:cNvSpPr>
+          <p:nvPr>
+            <p:ph type="title"/>
+          </p:nvPr>
+        </p:nvSpPr>
+        <p:spPr/>
+        <p:txBody>
+          <a:bodyPr/>
+          <a:lstStyle/>
+          <a:p>
+            <a:r>
+              <a:rPr lang="en-GB" dirty="0"/>
+              <a:t>2. Dusk/Night before guidance lights </a:t>
+            </a:r>
+          </a:p>
+        </p:txBody>
+      </p:sp>
+      <p:pic>
+        <p:nvPicPr>
+          <p:cNvPr id="5" name="Picture 4">
+            <a:extLst>
+              <a:ext uri="{FF2B5EF4-FFF2-40B4-BE49-F238E27FC236}">
+                <a16:creationId xmlns:a16="http://schemas.microsoft.com/office/drawing/2014/main" id="{381E3F57-FB84-1E32-A033-DEDCC74A24F2}"/>
+              </a:ext>
+            </a:extLst>
+          </p:cNvPr>
+          <p:cNvPicPr>
+            <a:picLocks noChangeAspect="1"/>
+          </p:cNvPicPr>
+          <p:nvPr/>
+        </p:nvPicPr>
+        <p:blipFill>
+          <a:blip r:embed="rId2"/>
+          <a:stretch>
+            <a:fillRect/>
+          </a:stretch>
+        </p:blipFill>
+        <p:spPr>
+          <a:xfrm>
+            <a:off x="364734" y="1825625"/>
+            <a:ext cx="11462532" cy="4484529"/>
+          </a:xfrm>
+          <a:prstGeom prst="rect">
+            <a:avLst/>
+          </a:prstGeom>
+        </p:spPr>
+      </p:pic>
+    </p:spTree>
+    <p:extLst>
+      <p:ext uri="{BB962C8B-B14F-4D97-AF65-F5344CB8AC3E}">
+        <p14:creationId xmlns:p14="http://schemas.microsoft.com/office/powerpoint/2010/main" val="1698884998"/>
+      </p:ext>
+    </p:extLst>
+  </p:cSld>
+  <p:clrMapOvr>
+    <a:masterClrMapping/>
+  </p:clrMapOvr>
+</p:sld>
+</file>
+
+<file path=ppt/slides/slide8.xml><?xml version="1.0" encoding="utf-8"?>
+<p:sld xmlns:a="http://schemas.openxmlformats.org/drawingml/2006/main" xmlns:r="http://schemas.openxmlformats.org/officeDocument/2006/relationships" xmlns:p="http://schemas.openxmlformats.org/presentationml/2006/main">
+  <p:cSld>
+    <p:spTree>
+      <p:nvGrpSpPr>
+        <p:cNvPr id="1" name=""/>
+        <p:cNvGrpSpPr/>
+        <p:nvPr/>
+      </p:nvGrpSpPr>
+      <p:grpSpPr>
+        <a:xfrm>
+          <a:off x="0" y="0"/>
+          <a:ext cx="0" cy="0"/>
+          <a:chOff x="0" y="0"/>
+          <a:chExt cx="0" cy="0"/>
+        </a:xfrm>
+      </p:grpSpPr>
+      <p:sp>
+        <p:nvSpPr>
+          <p:cNvPr id="2" name="Title 1">
+            <a:extLst>
+              <a:ext uri="{FF2B5EF4-FFF2-40B4-BE49-F238E27FC236}">
+                <a16:creationId xmlns:a16="http://schemas.microsoft.com/office/drawing/2014/main" id="{3B0C4F77-81E6-CDA6-78B1-9F4C144B035C}"/>
+              </a:ext>
+            </a:extLst>
+          </p:cNvPr>
+          <p:cNvSpPr>
+            <a:spLocks noGrp="1"/>
+          </p:cNvSpPr>
+          <p:nvPr>
+            <p:ph type="title"/>
+          </p:nvPr>
+        </p:nvSpPr>
+        <p:spPr/>
+        <p:txBody>
+          <a:bodyPr/>
+          <a:lstStyle/>
+          <a:p>
+            <a:r>
+              <a:rPr lang="en-GB" dirty="0"/>
+              <a:t>3. Final version with guidance lighting </a:t>
+            </a:r>
+          </a:p>
+        </p:txBody>
+      </p:sp>
+      <p:pic>
+        <p:nvPicPr>
+          <p:cNvPr id="4" name="Picture 3">
+            <a:extLst>
+              <a:ext uri="{FF2B5EF4-FFF2-40B4-BE49-F238E27FC236}">
+                <a16:creationId xmlns:a16="http://schemas.microsoft.com/office/drawing/2014/main" id="{10A174F4-0185-AD6B-6B6C-ABFE5F7ECCAD}"/>
+              </a:ext>
+            </a:extLst>
+          </p:cNvPr>
+          <p:cNvPicPr>
+            <a:picLocks noChangeAspect="1"/>
+          </p:cNvPicPr>
+          <p:nvPr/>
+        </p:nvPicPr>
+        <p:blipFill>
+          <a:blip r:embed="rId2"/>
+          <a:stretch>
+            <a:fillRect/>
+          </a:stretch>
+        </p:blipFill>
+        <p:spPr>
+          <a:xfrm>
+            <a:off x="1889890" y="1476374"/>
+            <a:ext cx="8211911" cy="4695825"/>
+          </a:xfrm>
+          <a:prstGeom prst="rect">
+            <a:avLst/>
+          </a:prstGeom>
+        </p:spPr>
+      </p:pic>
+    </p:spTree>
+    <p:extLst>
+      <p:ext uri="{BB962C8B-B14F-4D97-AF65-F5344CB8AC3E}">
+        <p14:creationId xmlns:p14="http://schemas.microsoft.com/office/powerpoint/2010/main" val="4292212361"/>
+      </p:ext>
+    </p:extLst>
+  </p:cSld>
+  <p:clrMapOvr>
+    <a:masterClrMapping/>
+  </p:clrMapOvr>
+</p:sld>
+</file>
+
+<file path=ppt/slides/slide9.xml><?xml version="1.0" encoding="utf-8"?>
+<p:sld xmlns:a="http://schemas.openxmlformats.org/drawingml/2006/main" xmlns:r="http://schemas.openxmlformats.org/officeDocument/2006/relationships" xmlns:p="http://schemas.openxmlformats.org/presentationml/2006/main">
+  <p:cSld>
+    <p:spTree>
+      <p:nvGrpSpPr>
+        <p:cNvPr id="1" name=""/>
+        <p:cNvGrpSpPr/>
+        <p:nvPr/>
+      </p:nvGrpSpPr>
+      <p:grpSpPr>
+        <a:xfrm>
+          <a:off x="0" y="0"/>
+          <a:ext cx="0" cy="0"/>
+          <a:chOff x="0" y="0"/>
+          <a:chExt cx="0" cy="0"/>
+        </a:xfrm>
+      </p:grpSpPr>
+      <p:sp>
+        <p:nvSpPr>
+          <p:cNvPr id="2" name="Title 1">
+            <a:extLst>
+              <a:ext uri="{FF2B5EF4-FFF2-40B4-BE49-F238E27FC236}">
+                <a16:creationId xmlns:a16="http://schemas.microsoft.com/office/drawing/2014/main" id="{D27032F6-B002-520B-11EE-1F56BC237B84}"/>
+              </a:ext>
+            </a:extLst>
+          </p:cNvPr>
+          <p:cNvSpPr>
+            <a:spLocks noGrp="1"/>
+          </p:cNvSpPr>
+          <p:nvPr>
+            <p:ph type="title"/>
+          </p:nvPr>
+        </p:nvSpPr>
+        <p:spPr/>
+        <p:txBody>
+          <a:bodyPr/>
+          <a:lstStyle/>
+          <a:p>
+            <a:r>
+              <a:rPr lang="en-GB" dirty="0" err="1"/>
+              <a:t>Devlog</a:t>
+            </a:r>
+            <a:r>
+              <a:rPr lang="en-GB" dirty="0"/>
+              <a:t> Prototype 1</a:t>
+            </a:r>
+          </a:p>
+        </p:txBody>
+      </p:sp>
+      <p:sp>
+        <p:nvSpPr>
+          <p:cNvPr id="3" name="Content Placeholder 2">
+            <a:extLst>
+              <a:ext uri="{FF2B5EF4-FFF2-40B4-BE49-F238E27FC236}">
+                <a16:creationId xmlns:a16="http://schemas.microsoft.com/office/drawing/2014/main" id="{10F0144D-71E8-DCA2-D95B-AA8CC887F30F}"/>
+              </a:ext>
+            </a:extLst>
+          </p:cNvPr>
+          <p:cNvSpPr>
+            <a:spLocks noGrp="1"/>
+          </p:cNvSpPr>
+          <p:nvPr>
+            <p:ph idx="1"/>
+          </p:nvPr>
+        </p:nvSpPr>
+        <p:spPr/>
+        <p:txBody>
+          <a:bodyPr/>
+          <a:lstStyle/>
+          <a:p>
+            <a:r>
+              <a:rPr lang="en-GB" dirty="0"/>
+              <a:t>Link – </a:t>
+            </a:r>
+          </a:p>
+          <a:p>
+            <a:endParaRPr lang="en-GB" dirty="0"/>
+          </a:p>
+        </p:txBody>
+      </p:sp>
+    </p:spTree>
+    <p:extLst>
+      <p:ext uri="{BB962C8B-B14F-4D97-AF65-F5344CB8AC3E}">
+        <p14:creationId xmlns:p14="http://schemas.microsoft.com/office/powerpoint/2010/main" val="2236898377"/>
       </p:ext>
     </p:extLst>
   </p:cSld>
